--- a/ゲーム科1年/00_前期/ゲームプログラミングⅢ/ゲーム数学/座学/14_変位.pptx
+++ b/ゲーム科1年/00_前期/ゲームプログラミングⅢ/ゲーム数学/座学/14_変位.pptx
@@ -264,7 +264,7 @@
           <a:p>
             <a:fld id="{E9CC885B-4903-4D54-9A93-00025F12DED9}" type="datetimeFigureOut">
               <a:rPr kumimoji="1" lang="ja-JP" altLang="en-US" smtClean="0"/>
-              <a:t>2024/10/10</a:t>
+              <a:t>2025/6/26</a:t>
             </a:fld>
             <a:endParaRPr kumimoji="1" lang="ja-JP" altLang="en-US"/>
           </a:p>
@@ -494,7 +494,7 @@
           <a:p>
             <a:fld id="{E9CC885B-4903-4D54-9A93-00025F12DED9}" type="datetimeFigureOut">
               <a:rPr kumimoji="1" lang="ja-JP" altLang="en-US" smtClean="0"/>
-              <a:t>2024/10/10</a:t>
+              <a:t>2025/6/26</a:t>
             </a:fld>
             <a:endParaRPr kumimoji="1" lang="ja-JP" altLang="en-US"/>
           </a:p>
@@ -734,7 +734,7 @@
           <a:p>
             <a:fld id="{E9CC885B-4903-4D54-9A93-00025F12DED9}" type="datetimeFigureOut">
               <a:rPr kumimoji="1" lang="ja-JP" altLang="en-US" smtClean="0"/>
-              <a:t>2024/10/10</a:t>
+              <a:t>2025/6/26</a:t>
             </a:fld>
             <a:endParaRPr kumimoji="1" lang="ja-JP" altLang="en-US"/>
           </a:p>
@@ -964,7 +964,7 @@
           <a:p>
             <a:fld id="{E9CC885B-4903-4D54-9A93-00025F12DED9}" type="datetimeFigureOut">
               <a:rPr kumimoji="1" lang="ja-JP" altLang="en-US" smtClean="0"/>
-              <a:t>2024/10/10</a:t>
+              <a:t>2025/6/26</a:t>
             </a:fld>
             <a:endParaRPr kumimoji="1" lang="ja-JP" altLang="en-US"/>
           </a:p>
@@ -1239,7 +1239,7 @@
           <a:p>
             <a:fld id="{E9CC885B-4903-4D54-9A93-00025F12DED9}" type="datetimeFigureOut">
               <a:rPr kumimoji="1" lang="ja-JP" altLang="en-US" smtClean="0"/>
-              <a:t>2024/10/10</a:t>
+              <a:t>2025/6/26</a:t>
             </a:fld>
             <a:endParaRPr kumimoji="1" lang="ja-JP" altLang="en-US"/>
           </a:p>
@@ -1568,7 +1568,7 @@
           <a:p>
             <a:fld id="{E9CC885B-4903-4D54-9A93-00025F12DED9}" type="datetimeFigureOut">
               <a:rPr kumimoji="1" lang="ja-JP" altLang="en-US" smtClean="0"/>
-              <a:t>2024/10/10</a:t>
+              <a:t>2025/6/26</a:t>
             </a:fld>
             <a:endParaRPr kumimoji="1" lang="ja-JP" altLang="en-US"/>
           </a:p>
@@ -2044,7 +2044,7 @@
           <a:p>
             <a:fld id="{E9CC885B-4903-4D54-9A93-00025F12DED9}" type="datetimeFigureOut">
               <a:rPr kumimoji="1" lang="ja-JP" altLang="en-US" smtClean="0"/>
-              <a:t>2024/10/10</a:t>
+              <a:t>2025/6/26</a:t>
             </a:fld>
             <a:endParaRPr kumimoji="1" lang="ja-JP" altLang="en-US"/>
           </a:p>
@@ -2185,7 +2185,7 @@
           <a:p>
             <a:fld id="{E9CC885B-4903-4D54-9A93-00025F12DED9}" type="datetimeFigureOut">
               <a:rPr kumimoji="1" lang="ja-JP" altLang="en-US" smtClean="0"/>
-              <a:t>2024/10/10</a:t>
+              <a:t>2025/6/26</a:t>
             </a:fld>
             <a:endParaRPr kumimoji="1" lang="ja-JP" altLang="en-US"/>
           </a:p>
@@ -2298,7 +2298,7 @@
           <a:p>
             <a:fld id="{E9CC885B-4903-4D54-9A93-00025F12DED9}" type="datetimeFigureOut">
               <a:rPr kumimoji="1" lang="ja-JP" altLang="en-US" smtClean="0"/>
-              <a:t>2024/10/10</a:t>
+              <a:t>2025/6/26</a:t>
             </a:fld>
             <a:endParaRPr kumimoji="1" lang="ja-JP" altLang="en-US"/>
           </a:p>
@@ -2641,7 +2641,7 @@
           <a:p>
             <a:fld id="{E9CC885B-4903-4D54-9A93-00025F12DED9}" type="datetimeFigureOut">
               <a:rPr kumimoji="1" lang="ja-JP" altLang="en-US" smtClean="0"/>
-              <a:t>2024/10/10</a:t>
+              <a:t>2025/6/26</a:t>
             </a:fld>
             <a:endParaRPr kumimoji="1" lang="ja-JP" altLang="en-US"/>
           </a:p>
@@ -2929,7 +2929,7 @@
           <a:p>
             <a:fld id="{E9CC885B-4903-4D54-9A93-00025F12DED9}" type="datetimeFigureOut">
               <a:rPr kumimoji="1" lang="ja-JP" altLang="en-US" smtClean="0"/>
-              <a:t>2024/10/10</a:t>
+              <a:t>2025/6/26</a:t>
             </a:fld>
             <a:endParaRPr kumimoji="1" lang="ja-JP" altLang="en-US"/>
           </a:p>
@@ -3202,7 +3202,7 @@
           <a:p>
             <a:fld id="{E9CC885B-4903-4D54-9A93-00025F12DED9}" type="datetimeFigureOut">
               <a:rPr kumimoji="1" lang="ja-JP" altLang="en-US" smtClean="0"/>
-              <a:t>2024/10/10</a:t>
+              <a:t>2025/6/26</a:t>
             </a:fld>
             <a:endParaRPr kumimoji="1" lang="ja-JP" altLang="en-US"/>
           </a:p>
@@ -4401,6 +4401,60 @@
       </p:grpSpPr>
       <p:sp>
         <p:nvSpPr>
+          <p:cNvPr id="3" name="四角形: 角を丸くする 2">
+            <a:extLst>
+              <a:ext uri="{FF2B5EF4-FFF2-40B4-BE49-F238E27FC236}">
+                <a16:creationId xmlns:a16="http://schemas.microsoft.com/office/drawing/2014/main" id="{1C2100EE-DF93-485E-B332-DC6D47D16013}"/>
+              </a:ext>
+            </a:extLst>
+          </p:cNvPr>
+          <p:cNvSpPr/>
+          <p:nvPr/>
+        </p:nvSpPr>
+        <p:spPr>
+          <a:xfrm>
+            <a:off x="6223000" y="2607733"/>
+            <a:ext cx="4529667" cy="2853267"/>
+          </a:xfrm>
+          <a:prstGeom prst="roundRect">
+            <a:avLst/>
+          </a:prstGeom>
+          <a:solidFill>
+            <a:schemeClr val="bg1">
+              <a:lumMod val="85000"/>
+            </a:schemeClr>
+          </a:solidFill>
+          <a:ln>
+            <a:noFill/>
+          </a:ln>
+        </p:spPr>
+        <p:style>
+          <a:lnRef idx="2">
+            <a:schemeClr val="accent1">
+              <a:shade val="50000"/>
+            </a:schemeClr>
+          </a:lnRef>
+          <a:fillRef idx="1">
+            <a:schemeClr val="accent1"/>
+          </a:fillRef>
+          <a:effectRef idx="0">
+            <a:schemeClr val="accent1"/>
+          </a:effectRef>
+          <a:fontRef idx="minor">
+            <a:schemeClr val="lt1"/>
+          </a:fontRef>
+        </p:style>
+        <p:txBody>
+          <a:bodyPr rtlCol="0" anchor="ctr"/>
+          <a:lstStyle/>
+          <a:p>
+            <a:pPr algn="ctr"/>
+            <a:endParaRPr kumimoji="1" lang="ja-JP" altLang="en-US"/>
+          </a:p>
+        </p:txBody>
+      </p:sp>
+      <p:sp>
+        <p:nvSpPr>
           <p:cNvPr id="4" name="テキスト ボックス 3">
             <a:extLst>
               <a:ext uri="{FF2B5EF4-FFF2-40B4-BE49-F238E27FC236}">
@@ -4748,8 +4802,8 @@
           </a:p>
         </p:txBody>
       </p:sp>
-      <mc:AlternateContent xmlns:mc="http://schemas.openxmlformats.org/markup-compatibility/2006">
-        <mc:Choice xmlns:a14="http://schemas.microsoft.com/office/drawing/2010/main" Requires="a14">
+      <mc:AlternateContent xmlns:mc="http://schemas.openxmlformats.org/markup-compatibility/2006" xmlns:a14="http://schemas.microsoft.com/office/drawing/2010/main">
+        <mc:Choice Requires="a14">
           <p:sp>
             <p:nvSpPr>
               <p:cNvPr id="11" name="テキスト ボックス 10">
@@ -4989,7 +5043,7 @@
             </p:txBody>
           </p:sp>
         </mc:Choice>
-        <mc:Fallback>
+        <mc:Fallback xmlns="">
           <p:sp>
             <p:nvSpPr>
               <p:cNvPr id="11" name="テキスト ボックス 10">
@@ -5229,10 +5283,18 @@
               </a:p>
               <a:p>
                 <a:r>
-                  <a:rPr lang="ja-JP" altLang="en-US" sz="2400" dirty="0"/>
+                  <a:rPr lang="ja-JP" altLang="en-US" sz="2400" b="1" dirty="0">
+                    <a:solidFill>
+                      <a:srgbClr val="FF0000"/>
+                    </a:solidFill>
+                  </a:rPr>
                   <a:t>■解答</a:t>
                 </a:r>
-                <a:endParaRPr lang="en-US" altLang="ja-JP" sz="2400" dirty="0"/>
+                <a:endParaRPr lang="en-US" altLang="ja-JP" sz="2400" b="1" dirty="0">
+                  <a:solidFill>
+                    <a:srgbClr val="FF0000"/>
+                  </a:solidFill>
+                </a:endParaRPr>
               </a:p>
               <a:p>
                 <a:r>
@@ -5288,19 +5350,7 @@
                       <a:rPr lang="en-US" altLang="ja-JP" sz="2400" b="0" i="1" dirty="0" smtClean="0">
                         <a:latin typeface="Cambria Math" panose="02040503050406030204" pitchFamily="18" charset="0"/>
                       </a:rPr>
-                      <m:t>−</m:t>
-                    </m:r>
-                    <m:r>
-                      <a:rPr lang="en-US" altLang="ja-JP" sz="2400" i="1" dirty="0" smtClean="0">
-                        <a:latin typeface="Cambria Math" panose="02040503050406030204" pitchFamily="18" charset="0"/>
-                      </a:rPr>
-                      <m:t>1</m:t>
-                    </m:r>
-                    <m:r>
-                      <a:rPr lang="en-US" altLang="ja-JP" sz="2400" b="0" i="1" dirty="0" smtClean="0">
-                        <a:latin typeface="Cambria Math" panose="02040503050406030204" pitchFamily="18" charset="0"/>
-                      </a:rPr>
-                      <m:t>00</m:t>
+                      <m:t>−100</m:t>
                     </m:r>
                     <m:r>
                       <a:rPr lang="en-US" altLang="ja-JP" sz="2400" b="0" i="1" dirty="0" smtClean="0">
@@ -5559,10 +5609,18 @@
               </a:p>
               <a:p>
                 <a:r>
-                  <a:rPr lang="ja-JP" altLang="en-US" sz="2400" dirty="0"/>
+                  <a:rPr lang="ja-JP" altLang="en-US" sz="2400" b="1" dirty="0">
+                    <a:solidFill>
+                      <a:srgbClr val="FF0000"/>
+                    </a:solidFill>
+                  </a:rPr>
                   <a:t>■解答</a:t>
                 </a:r>
-                <a:endParaRPr lang="en-US" altLang="ja-JP" sz="2400" dirty="0"/>
+                <a:endParaRPr lang="en-US" altLang="ja-JP" sz="2400" b="1" dirty="0">
+                  <a:solidFill>
+                    <a:srgbClr val="FF0000"/>
+                  </a:solidFill>
+                </a:endParaRPr>
               </a:p>
               <a:p>
                 <a:r>
@@ -5610,19 +5668,7 @@
                       <a:rPr lang="en-US" altLang="ja-JP" sz="2400" b="0" i="1" dirty="0" smtClean="0">
                         <a:latin typeface="Cambria Math" panose="02040503050406030204" pitchFamily="18" charset="0"/>
                       </a:rPr>
-                      <m:t>−</m:t>
-                    </m:r>
-                    <m:r>
-                      <a:rPr lang="en-US" altLang="ja-JP" sz="2400" i="1" dirty="0" smtClean="0">
-                        <a:latin typeface="Cambria Math" panose="02040503050406030204" pitchFamily="18" charset="0"/>
-                      </a:rPr>
-                      <m:t>1</m:t>
-                    </m:r>
-                    <m:r>
-                      <a:rPr lang="en-US" altLang="ja-JP" sz="2400" b="0" i="1" dirty="0" smtClean="0">
-                        <a:latin typeface="Cambria Math" panose="02040503050406030204" pitchFamily="18" charset="0"/>
-                      </a:rPr>
-                      <m:t>00</m:t>
+                      <m:t>−100</m:t>
                     </m:r>
                     <m:r>
                       <a:rPr lang="en-US" altLang="ja-JP" sz="2400" b="0" i="1" dirty="0" smtClean="0">
